--- a/docs/毕业答辩PPT_谢世隆_侗乡医药数字展示平台.pptx
+++ b/docs/毕业答辩PPT_谢世隆_侗乡医药数字展示平台.pptx
@@ -10755,7 +10755,7 @@
               </a:defRPr>
             </a:pPr>
             <a:r>
-              <a:t>浏览器(XSS过滤) -&gt; Nginx(CORS/CSP/HSTS) -&gt; Sa-Token(JWT验证) -&gt; XssFilter(请求净化) -&gt; RateLimit(接口限流) -&gt; Controller(参数校验) -&gt; Service(业务逻辑)</a:t>
+              <a:t>浏览器(XSS过滤) -&gt; Nginx(CORS/CSP/HSTS) -&gt; Sa-Token(HttpOnly Cookie+JWT) -&gt; XssFilter(请求净化) -&gt; RateLimit(接口限流)+LoginAttempt(账户锁定) -&gt; Controller(参数校验) -&gt; Service(业务逻辑)</a:t>
             </a:r>
           </a:p>
         </p:txBody>
@@ -13637,7 +13637,7 @@
               </a:defRPr>
             </a:pPr>
             <a:r>
-              <a:t>  单元测试：62个类覆盖全部Controller和Service</a:t>
+              <a:t>  单元测试：86个测试文件覆盖全部Controller和Service（724个测试方法）</a:t>
             </a:r>
           </a:p>
           <a:p>
@@ -13848,7 +13848,7 @@
               </a:defRPr>
             </a:pPr>
             <a:r>
-              <a:t>  单元测试：25个文件覆盖utils/composables/store</a:t>
+              <a:t>  单元测试：29个文件覆盖utils/composables/store/核心组件（755个测试方法）</a:t>
             </a:r>
           </a:p>
           <a:p>
@@ -14091,7 +14091,7 @@
               </a:defRPr>
             </a:pPr>
             <a:r>
-              <a:t>  安全测试：XSS/SQL注入/认证/限流/多层脱敏</a:t>
+              <a:t>  安全测试：XSS/SQL注入/认证/限流/账户锁定/HttpOnly Cookie/多层脱敏</a:t>
             </a:r>
           </a:p>
           <a:p>
@@ -23888,7 +23888,7 @@
               </a:defRPr>
             </a:pPr>
             <a:r>
-              <a:t>JWT</a:t>
+              <a:t>HttpOnly Cookie + JWT</a:t>
             </a:r>
           </a:p>
           <a:p>

--- a/docs/毕业答辩PPT_谢世隆_侗乡医药数字展示平台.pptx
+++ b/docs/毕业答辩PPT_谢世隆_侗乡医药数字展示平台.pptx
@@ -5237,7 +5237,7 @@
               </a:defRPr>
             </a:pPr>
             <a:r>
-              <a:t>16个数据访问接口</a:t>
+              <a:t>17个数据访问接口</a:t>
             </a:r>
           </a:p>
           <a:p>
@@ -25812,7 +25812,7 @@
               </a:defRPr>
             </a:pPr>
             <a:r>
-              <a:t>前端 84组件</a:t>
+              <a:t>前端 85组件</a:t>
             </a:r>
           </a:p>
         </p:txBody>
@@ -30155,7 +30155,7 @@
               </a:defRPr>
             </a:pPr>
             <a:r>
-              <a:t>84 Vue组件  |  14 页面  |  19 管理后台组件  |  17 Composables  |  8 自定义指令  |  14 路由</a:t>
+              <a:t>85 Vue组件  |  14 页面  |  19 管理后台组件  |  19 Composables  |  8 自定义指令  |  14 路由</a:t>
             </a:r>
           </a:p>
         </p:txBody>
